--- a/Topic_A/Exam_Practice/AT-A-L06_Writing_Workshop_Healthy_Eating_and_Lifestyle_Choices.pptx
+++ b/Topic_A/Exam_Practice/AT-A-L06_Writing_Workshop_Healthy_Eating_and_Lifestyle_Choices.pptx
@@ -784,7 +784,11 @@
           <a:lstStyle/>
           <a:p>
             <a:r>
-              <a:rPr lang="en-US" dirty="0"/>
+              <a:rPr lang="ar-SA" dirty="0">
+                <a:latin typeface="Amiri" pitchFamily="2" charset="-78"/>
+                <a:ea typeface="Amiri" pitchFamily="2" charset="-78"/>
+                <a:cs typeface="Amiri" pitchFamily="2" charset="-78"/>
+              </a:rPr>
               <a:t>Q3 (3 min to choose and read). Title (أ) suits Core and Develop; title (ب) suits Stretch.</a:t>
             </a:r>
             <a:endParaRPr lang="en-US" dirty="0"/>
@@ -1403,7 +1407,11 @@
           <a:lstStyle/>
           <a:p>
             <a:r>
-              <a:rPr lang="en-US" dirty="0"/>
+              <a:rPr lang="ar-SA" dirty="0">
+                <a:latin typeface="Amiri" pitchFamily="2" charset="-78"/>
+                <a:ea typeface="Amiri" pitchFamily="2" charset="-78"/>
+                <a:cs typeface="Amiri" pitchFamily="2" charset="-78"/>
+              </a:rPr>
               <a:t>WELCOME (1 min) — while students join.
 • Greet each student by name as they arrive: السَّلَامُ عَلَيْكُمْ. Take the register (Pastoral Tracker: attendance 0/1).
 • 2-MINUTE CHECK-IN (SEND training): a private chat to any student who seemed unsettled last lesson — “Are you okay today? 👍 / 👎”.
@@ -1672,7 +1680,11 @@
           <a:lstStyle/>
           <a:p>
             <a:r>
-              <a:rPr lang="en-US" dirty="0"/>
+              <a:rPr lang="ar-SA" dirty="0">
+                <a:latin typeface="Amiri" pitchFamily="2" charset="-78"/>
+                <a:ea typeface="Amiri" pitchFamily="2" charset="-78"/>
+                <a:cs typeface="Amiri" pitchFamily="2" charset="-78"/>
+              </a:rPr>
               <a:t>QUESTION 1 — FORM FILLING. About 8 minutes. Core: boxes 1–6. Develop / Stretch: all 8. Box 7 is a noun phrase (السَّهَرُ عَلَى الهَاتِفِ), not a verb.</a:t>
             </a:r>
             <a:endParaRPr lang="en-US" dirty="0"/>
@@ -1936,7 +1948,11 @@
           <a:lstStyle/>
           <a:p>
             <a:r>
-              <a:rPr lang="en-US" dirty="0"/>
+              <a:rPr lang="ar-SA" dirty="0">
+                <a:latin typeface="Amiri" pitchFamily="2" charset="-78"/>
+                <a:ea typeface="Amiri" pitchFamily="2" charset="-78"/>
+                <a:cs typeface="Amiri" pitchFamily="2" charset="-78"/>
+              </a:rPr>
               <a:t>Question words: مَاذَا (what) · أَيَّ (which) · كَمْ مَرَّةً (how often) · مَا (what) — bullet 4 has a PAST verb (فَعَلْتَ) and asks for ADVICE.</a:t>
             </a:r>
             <a:endParaRPr lang="en-US" dirty="0"/>
@@ -2508,6 +2524,7 @@
                   <a:srgbClr val="D4AF37"/>
                 </a:solidFill>
                 <a:latin typeface="Amiri" pitchFamily="2" charset="-78"/>
+                <a:ea typeface="Amiri" pitchFamily="2" charset="-78"/>
                 <a:cs typeface="Amiri" pitchFamily="2" charset="-78"/>
               </a:rPr>
               <a:t>م</a:t>
@@ -2714,6 +2731,7 @@
                   <a:srgbClr val="D4AF37"/>
                 </a:solidFill>
                 <a:latin typeface="Amiri" pitchFamily="2" charset="-78"/>
+                <a:ea typeface="Amiri" pitchFamily="2" charset="-78"/>
                 <a:cs typeface="Amiri" pitchFamily="2" charset="-78"/>
               </a:rPr>
               <a:t>وَرْشَةُ الكِتَابَةِ — نَمَطُ الحَيَاةِ الصِّحِّيُّ</a:t>
@@ -3171,6 +3189,7 @@
                   <a:srgbClr val="D4AF37"/>
                 </a:solidFill>
                 <a:latin typeface="Amiri" pitchFamily="2" charset="-78"/>
+                <a:ea typeface="Amiri" pitchFamily="2" charset="-78"/>
                 <a:cs typeface="Amiri" pitchFamily="2" charset="-78"/>
               </a:rPr>
               <a:t>م</a:t>
@@ -3491,6 +3510,7 @@
                   <a:srgbClr val="8A6D1E"/>
                 </a:solidFill>
                 <a:latin typeface="Amiri" pitchFamily="2" charset="-78"/>
+                <a:ea typeface="Amiri" pitchFamily="2" charset="-78"/>
                 <a:cs typeface="Amiri" pitchFamily="2" charset="-78"/>
               </a:rPr>
               <a:t>نَمُوذَجُ الإِجَابَةِ</a:t>
@@ -3604,6 +3624,7 @@
                   <a:srgbClr val="1F2A37"/>
                 </a:solidFill>
                 <a:latin typeface="Amiri" pitchFamily="2" charset="-78"/>
+                <a:ea typeface="Amiri" pitchFamily="2" charset="-78"/>
                 <a:cs typeface="Amiri" pitchFamily="2" charset="-78"/>
               </a:rPr>
               <a:t>مَرْحَبًا يَا عُمَرُ،</a:t>
@@ -3623,6 +3644,7 @@
                   <a:srgbClr val="1F2A37"/>
                 </a:solidFill>
                 <a:latin typeface="Amiri" pitchFamily="2" charset="-78"/>
+                <a:ea typeface="Amiri" pitchFamily="2" charset="-78"/>
                 <a:cs typeface="Amiri" pitchFamily="2" charset="-78"/>
               </a:rPr>
               <a:t>كَيْفَ حَالُكَ؟ أُرِيدُ أَنْ أُخْبِرَكَ عَنْ عَادَاتِي الصِّحِّيَّةِ. آكُلُ الخُضَارَ وَالفَوَاكِهَ كُلَّ يَوْمٍ، وَأَشْرَبُ المَاءَ كَثِيرًا. أُمَارِسُ كُرَةَ القَدَمِ مَرَّتَيْنِ فِي الأُسْبُوعِ، وَأَنَامُ ثَمَانِيَ سَاعَاتٍ. لٰكِنِّي أُحِبُّ الشُّوكُولَاتَةَ كَثِيرًا. أَمْسِ لَعِبْتُ فِي المُبَارَاةِ وَأَكَلْتُ سَلَطَةً كَبِيرَةً فِي المَسَاءِ. نَصِيحَتِي لَكَ: يَجِبُ أَنْ تَشْرَبَ المَاءَ وَتَنَامَ مُبَكِّرًا، لِأَنَّ النَّوْمَ مُهِمٌّ جِدًّا.</a:t>
@@ -3642,6 +3664,7 @@
                   <a:srgbClr val="1F2A37"/>
                 </a:solidFill>
                 <a:latin typeface="Amiri" pitchFamily="2" charset="-78"/>
+                <a:ea typeface="Amiri" pitchFamily="2" charset="-78"/>
                 <a:cs typeface="Amiri" pitchFamily="2" charset="-78"/>
               </a:rPr>
               <a:t>مَعَ السَّلَامَةِ،</a:t>
@@ -3661,6 +3684,7 @@
                   <a:srgbClr val="1F2A37"/>
                 </a:solidFill>
                 <a:latin typeface="Amiri" pitchFamily="2" charset="-78"/>
+                <a:ea typeface="Amiri" pitchFamily="2" charset="-78"/>
                 <a:cs typeface="Amiri" pitchFamily="2" charset="-78"/>
               </a:rPr>
               <a:t>خَالِدٌ</a:t>
@@ -3824,11 +3848,12 @@
               <a:buNone/>
             </a:pPr>
             <a:r>
-              <a:rPr lang="en-US" sz="950" b="1" dirty="0">
+              <a:rPr lang="ar-SA" sz="950" b="1" dirty="0">
                 <a:solidFill>
                   <a:srgbClr val="FFFFFF"/>
                 </a:solidFill>
                 <a:latin typeface="Calibri" pitchFamily="34" charset="0"/>
+                <a:ea typeface="Amiri" pitchFamily="2" charset="-78"/>
                 <a:cs typeface="Amiri" pitchFamily="2" charset="-78"/>
               </a:rPr>
               <a:t>كُلَّ يَوْمٍ</a:t>
@@ -3889,11 +3914,12 @@
               <a:buNone/>
             </a:pPr>
             <a:r>
-              <a:rPr lang="en-US" sz="950" b="1" dirty="0">
+              <a:rPr lang="ar-SA" sz="950" b="1" dirty="0">
                 <a:solidFill>
                   <a:srgbClr val="FFFFFF"/>
                 </a:solidFill>
                 <a:latin typeface="Calibri" pitchFamily="34" charset="0"/>
+                <a:ea typeface="Amiri" pitchFamily="2" charset="-78"/>
                 <a:cs typeface="Amiri" pitchFamily="2" charset="-78"/>
               </a:rPr>
               <a:t>مَرَّتَيْنِ</a:t>
@@ -3954,11 +3980,12 @@
               <a:buNone/>
             </a:pPr>
             <a:r>
-              <a:rPr lang="en-US" sz="950" b="1" dirty="0">
+              <a:rPr lang="ar-SA" sz="950" b="1" dirty="0">
                 <a:solidFill>
                   <a:srgbClr val="FFFFFF"/>
                 </a:solidFill>
                 <a:latin typeface="Calibri" pitchFamily="34" charset="0"/>
+                <a:ea typeface="Amiri" pitchFamily="2" charset="-78"/>
                 <a:cs typeface="Amiri" pitchFamily="2" charset="-78"/>
               </a:rPr>
               <a:t>لٰكِنِّي</a:t>
@@ -4019,11 +4046,12 @@
               <a:buNone/>
             </a:pPr>
             <a:r>
-              <a:rPr lang="en-US" sz="950" b="1" dirty="0">
+              <a:rPr lang="ar-SA" sz="950" b="1" dirty="0">
                 <a:solidFill>
                   <a:srgbClr val="FFFFFF"/>
                 </a:solidFill>
                 <a:latin typeface="Calibri" pitchFamily="34" charset="0"/>
+                <a:ea typeface="Amiri" pitchFamily="2" charset="-78"/>
                 <a:cs typeface="Amiri" pitchFamily="2" charset="-78"/>
               </a:rPr>
               <a:t>يَجِبُ أَنْ تَشْرَبَ</a:t>
@@ -4157,6 +4185,7 @@
                   <a:srgbClr val="D4AF37"/>
                 </a:solidFill>
                 <a:latin typeface="Amiri" pitchFamily="2" charset="-78"/>
+                <a:ea typeface="Amiri" pitchFamily="2" charset="-78"/>
                 <a:cs typeface="Amiri" pitchFamily="2" charset="-78"/>
               </a:rPr>
               <a:t>م</a:t>
@@ -4477,6 +4506,7 @@
                   <a:srgbClr val="8A6D1E"/>
                 </a:solidFill>
                 <a:latin typeface="Amiri" pitchFamily="2" charset="-78"/>
+                <a:ea typeface="Amiri" pitchFamily="2" charset="-78"/>
                 <a:cs typeface="Amiri" pitchFamily="2" charset="-78"/>
               </a:rPr>
               <a:t>نَمُوذَجُ الإِجَابَةِ</a:t>
@@ -4590,6 +4620,7 @@
                   <a:srgbClr val="1F2A37"/>
                 </a:solidFill>
                 <a:latin typeface="Amiri" pitchFamily="2" charset="-78"/>
+                <a:ea typeface="Amiri" pitchFamily="2" charset="-78"/>
                 <a:cs typeface="Amiri" pitchFamily="2" charset="-78"/>
               </a:rPr>
               <a:t>مَرْحَبًا يَا عُمَرُ،</a:t>
@@ -4609,6 +4640,7 @@
                   <a:srgbClr val="1F2A37"/>
                 </a:solidFill>
                 <a:latin typeface="Amiri" pitchFamily="2" charset="-78"/>
+                <a:ea typeface="Amiri" pitchFamily="2" charset="-78"/>
                 <a:cs typeface="Amiri" pitchFamily="2" charset="-78"/>
               </a:rPr>
               <a:t>كَيْفَ حَالُكَ؟ سَأَلْتَنِي فِي رِسَالَتِكَ عَنْ عَادَاتِي الصِّحِّيَّةِ. أَحْرِصُ عَلَى أَنْ آكُلَ الخُضَارَ وَالفَوَاكِهَ يَوْمِيًّا، وَأَشْرَبُ ثَمَانِيَةَ أَكْوَابٍ مِنَ المَاءِ. أُمَارِسُ كُرَةَ القَدَمِ مَرَّتَيْنِ فِي الأُسْبُوعِ، وَأَمْشِي إِلَى المَدْرَسَةِ كُلَّ صَبَاحٍ. لٰكِنَّ عِنْدِي عَادَةً سَيِّئَةً: أَسْهَرُ أَحْيَانًا عَلَى الهَاتِفِ. أَمْسِ، بَعْدَ المُبَارَاةِ، أَكَلْتُ سَلَطَةً كَبِيرَةً مَعَ الدَّجَاجِ المَشْوِيِّ، وَنِمْتُ فِي العَاشِرَةِ. نَصِيحَتِي لَكَ: يَجِبُ أَنْ تَنَامَ ثَمَانِيَ سَاعَاتٍ، وَيَنْبَغِي أَلَّا تَشْرَبَ المَشْرُوبَاتِ الغَازِيَّةَ، لِأَنَّهَا مَلِيئَةٌ بِالسُّكَّرِ. وَأَنْتَ، مَا رِيَاضَتُكَ المُفَضَّلَةُ؟ وَكَمْ سَاعَةً تَنَامُ فِي اللَّيْلِ؟ أَنْتَظِرُ رَدَّكَ.</a:t>
@@ -4628,6 +4660,7 @@
                   <a:srgbClr val="1F2A37"/>
                 </a:solidFill>
                 <a:latin typeface="Amiri" pitchFamily="2" charset="-78"/>
+                <a:ea typeface="Amiri" pitchFamily="2" charset="-78"/>
                 <a:cs typeface="Amiri" pitchFamily="2" charset="-78"/>
               </a:rPr>
               <a:t>مَعَ تَحِيَّاتِي،</a:t>
@@ -4647,6 +4680,7 @@
                   <a:srgbClr val="1F2A37"/>
                 </a:solidFill>
                 <a:latin typeface="Amiri" pitchFamily="2" charset="-78"/>
+                <a:ea typeface="Amiri" pitchFamily="2" charset="-78"/>
                 <a:cs typeface="Amiri" pitchFamily="2" charset="-78"/>
               </a:rPr>
               <a:t>خَالِدٌ</a:t>
@@ -4810,11 +4844,12 @@
               <a:buNone/>
             </a:pPr>
             <a:r>
-              <a:rPr lang="en-US" sz="950" b="1" dirty="0">
+              <a:rPr lang="ar-SA" sz="950" b="1" dirty="0">
                 <a:solidFill>
                   <a:srgbClr val="FFFFFF"/>
                 </a:solidFill>
                 <a:latin typeface="Calibri" pitchFamily="34" charset="0"/>
+                <a:ea typeface="Amiri" pitchFamily="2" charset="-78"/>
                 <a:cs typeface="Amiri" pitchFamily="2" charset="-78"/>
               </a:rPr>
               <a:t>أَحْرِصُ عَلَى أَنْ آكُلَ</a:t>
@@ -4875,11 +4910,12 @@
               <a:buNone/>
             </a:pPr>
             <a:r>
-              <a:rPr lang="en-US" sz="950" b="1" dirty="0">
+              <a:rPr lang="ar-SA" sz="950" b="1" dirty="0">
                 <a:solidFill>
                   <a:srgbClr val="FFFFFF"/>
                 </a:solidFill>
                 <a:latin typeface="Calibri" pitchFamily="34" charset="0"/>
+                <a:ea typeface="Amiri" pitchFamily="2" charset="-78"/>
                 <a:cs typeface="Amiri" pitchFamily="2" charset="-78"/>
               </a:rPr>
               <a:t>لٰكِنَّ عِنْدِي عَادَةً</a:t>
@@ -4940,11 +4976,12 @@
               <a:buNone/>
             </a:pPr>
             <a:r>
-              <a:rPr lang="en-US" sz="950" b="1" dirty="0">
+              <a:rPr lang="ar-SA" sz="950" b="1" dirty="0">
                 <a:solidFill>
                   <a:srgbClr val="FFFFFF"/>
                 </a:solidFill>
                 <a:latin typeface="Calibri" pitchFamily="34" charset="0"/>
+                <a:ea typeface="Amiri" pitchFamily="2" charset="-78"/>
                 <a:cs typeface="Amiri" pitchFamily="2" charset="-78"/>
               </a:rPr>
               <a:t>نِمْتُ فِي العَاشِرَةِ</a:t>
@@ -5005,11 +5042,12 @@
               <a:buNone/>
             </a:pPr>
             <a:r>
-              <a:rPr lang="en-US" sz="950" b="1" dirty="0">
+              <a:rPr lang="ar-SA" sz="950" b="1" dirty="0">
                 <a:solidFill>
                   <a:srgbClr val="FFFFFF"/>
                 </a:solidFill>
                 <a:latin typeface="Calibri" pitchFamily="34" charset="0"/>
+                <a:ea typeface="Amiri" pitchFamily="2" charset="-78"/>
                 <a:cs typeface="Amiri" pitchFamily="2" charset="-78"/>
               </a:rPr>
               <a:t>يَنْبَغِي أَلَّا تَشْرَبَ</a:t>
@@ -5143,6 +5181,7 @@
                   <a:srgbClr val="D4AF37"/>
                 </a:solidFill>
                 <a:latin typeface="Amiri" pitchFamily="2" charset="-78"/>
+                <a:ea typeface="Amiri" pitchFamily="2" charset="-78"/>
                 <a:cs typeface="Amiri" pitchFamily="2" charset="-78"/>
               </a:rPr>
               <a:t>م</a:t>
@@ -5463,6 +5502,7 @@
                   <a:srgbClr val="8A6D1E"/>
                 </a:solidFill>
                 <a:latin typeface="Amiri" pitchFamily="2" charset="-78"/>
+                <a:ea typeface="Amiri" pitchFamily="2" charset="-78"/>
                 <a:cs typeface="Amiri" pitchFamily="2" charset="-78"/>
               </a:rPr>
               <a:t>اخْتَرْ عُنْوَانًا وَاحِدًا</a:t>
@@ -5743,6 +5783,7 @@
                   <a:srgbClr val="1B3B6F"/>
                 </a:solidFill>
                 <a:latin typeface="Amiri" pitchFamily="2" charset="-78"/>
+                <a:ea typeface="Amiri" pitchFamily="2" charset="-78"/>
                 <a:cs typeface="Amiri" pitchFamily="2" charset="-78"/>
               </a:rPr>
               <a:t>كَيْفَ أُحَافِظُ عَلَى صِحَّتِي</a:t>
@@ -5781,6 +5822,7 @@
                   <a:srgbClr val="1B3B6F"/>
                 </a:solidFill>
                 <a:latin typeface="Amiri" pitchFamily="2" charset="-78"/>
+                <a:ea typeface="Amiri" pitchFamily="2" charset="-78"/>
                 <a:cs typeface="Amiri" pitchFamily="2" charset="-78"/>
               </a:rPr>
               <a:t>(أ)</a:t>
@@ -5887,6 +5929,7 @@
                   <a:srgbClr val="1B3B6F"/>
                 </a:solidFill>
                 <a:latin typeface="Amiri" pitchFamily="2" charset="-78"/>
+                <a:ea typeface="Amiri" pitchFamily="2" charset="-78"/>
                 <a:cs typeface="Amiri" pitchFamily="2" charset="-78"/>
               </a:rPr>
               <a:t>مَاذَا تَأْكُلُ وَتَشْرَبُ؟ · الرِّيَاضَةُ وَالنَّوْمُ فِي حَيَاتِكَ · عَادَةٌ غَيَّرْتَهَا أَوْ تُرِيدُ أَنْ تُغَيِّرَهَا · نَصَائِحُكَ وَخُطَطُكَ لِلْمُسْتَقْبَلِ</a:t>
@@ -6018,6 +6061,7 @@
                   <a:srgbClr val="1B3B6F"/>
                 </a:solidFill>
                 <a:latin typeface="Amiri" pitchFamily="2" charset="-78"/>
+                <a:ea typeface="Amiri" pitchFamily="2" charset="-78"/>
                 <a:cs typeface="Amiri" pitchFamily="2" charset="-78"/>
               </a:rPr>
               <a:t>صِحَّةُ الشَّبَابِ: مَسْؤُولِيَّةُ مَنْ؟</a:t>
@@ -6056,6 +6100,7 @@
                   <a:srgbClr val="1B3B6F"/>
                 </a:solidFill>
                 <a:latin typeface="Amiri" pitchFamily="2" charset="-78"/>
+                <a:ea typeface="Amiri" pitchFamily="2" charset="-78"/>
                 <a:cs typeface="Amiri" pitchFamily="2" charset="-78"/>
               </a:rPr>
               <a:t>(ب)</a:t>
@@ -6162,6 +6207,7 @@
                   <a:srgbClr val="1B3B6F"/>
                 </a:solidFill>
                 <a:latin typeface="Amiri" pitchFamily="2" charset="-78"/>
+                <a:ea typeface="Amiri" pitchFamily="2" charset="-78"/>
                 <a:cs typeface="Amiri" pitchFamily="2" charset="-78"/>
               </a:rPr>
               <a:t>كَيْفَ تَغَيَّرَتْ عَادَاتُ الشَّبَابِ؟ · دَوْرُ الأُسْرَةِ وَالمَدْرَسَةِ · تَجْرِبَةٌ أَوْ مُبَادَرَةٌ شَارَكْتَ فِيهَا · مَا رَأْيُكَ؟ وَمَاذَا تَقْتَرِحُ؟</a:t>
@@ -6361,6 +6407,7 @@
                   <a:srgbClr val="D4AF37"/>
                 </a:solidFill>
                 <a:latin typeface="Amiri" pitchFamily="2" charset="-78"/>
+                <a:ea typeface="Amiri" pitchFamily="2" charset="-78"/>
                 <a:cs typeface="Amiri" pitchFamily="2" charset="-78"/>
               </a:rPr>
               <a:t>م</a:t>
@@ -6681,6 +6728,7 @@
                   <a:srgbClr val="8A6D1E"/>
                 </a:solidFill>
                 <a:latin typeface="Amiri" pitchFamily="2" charset="-78"/>
+                <a:ea typeface="Amiri" pitchFamily="2" charset="-78"/>
                 <a:cs typeface="Amiri" pitchFamily="2" charset="-78"/>
               </a:rPr>
               <a:t>خُطَّةُ الكِتَابَةِ</a:t>
@@ -7305,6 +7353,7 @@
                   <a:srgbClr val="1B3B6F"/>
                 </a:solidFill>
                 <a:latin typeface="Amiri" pitchFamily="2" charset="-78"/>
+                <a:ea typeface="Amiri" pitchFamily="2" charset="-78"/>
                 <a:cs typeface="Amiri" pitchFamily="2" charset="-78"/>
               </a:rPr>
               <a:t>أُمَارِسُ الرِّيَاضَةَ ثَلَاثَ مَرَّاتٍ فِي الأُسْبُوعِ.</a:t>
@@ -7404,6 +7453,7 @@
                   <a:srgbClr val="1B3B6F"/>
                 </a:solidFill>
                 <a:latin typeface="Amiri" pitchFamily="2" charset="-78"/>
+                <a:ea typeface="Amiri" pitchFamily="2" charset="-78"/>
                 <a:cs typeface="Amiri" pitchFamily="2" charset="-78"/>
               </a:rPr>
               <a:t>كُنْتُ أَشْرَبُ المَشْرُوبَاتِ الغَازِيَّةَ كُلَّ يَوْمٍ.</a:t>
@@ -7503,6 +7553,7 @@
                   <a:srgbClr val="1B3B6F"/>
                 </a:solidFill>
                 <a:latin typeface="Amiri" pitchFamily="2" charset="-78"/>
+                <a:ea typeface="Amiri" pitchFamily="2" charset="-78"/>
                 <a:cs typeface="Amiri" pitchFamily="2" charset="-78"/>
               </a:rPr>
               <a:t>سَأَتَعَلَّمُ طَبْخَ وَجَبَاتٍ صِحِّيَّةٍ.</a:t>
@@ -7664,6 +7715,7 @@
                   <a:srgbClr val="1F2A37"/>
                 </a:solidFill>
                 <a:latin typeface="Amiri" pitchFamily="2" charset="-78"/>
+                <a:ea typeface="Amiri" pitchFamily="2" charset="-78"/>
                 <a:cs typeface="Amiri" pitchFamily="2" charset="-78"/>
               </a:rPr>
               <a:t>أ</a:t>
@@ -7690,6 +7742,7 @@
                   <a:srgbClr val="1F2A37"/>
                 </a:solidFill>
                 <a:latin typeface="Amiri" pitchFamily="2" charset="-78"/>
+                <a:ea typeface="Amiri" pitchFamily="2" charset="-78"/>
                 <a:cs typeface="Amiri" pitchFamily="2" charset="-78"/>
               </a:rPr>
               <a:t>ب</a:t>
@@ -7836,6 +7889,7 @@
                   <a:srgbClr val="D4AF37"/>
                 </a:solidFill>
                 <a:latin typeface="Amiri" pitchFamily="2" charset="-78"/>
+                <a:ea typeface="Amiri" pitchFamily="2" charset="-78"/>
                 <a:cs typeface="Amiri" pitchFamily="2" charset="-78"/>
               </a:rPr>
               <a:t>م</a:t>
@@ -8093,6 +8147,7 @@
                   <a:srgbClr val="8A6D1E"/>
                 </a:solidFill>
                 <a:latin typeface="Amiri" pitchFamily="2" charset="-78"/>
+                <a:ea typeface="Amiri" pitchFamily="2" charset="-78"/>
                 <a:cs typeface="Amiri" pitchFamily="2" charset="-78"/>
               </a:rPr>
               <a:t>أ</a:t>
@@ -8157,6 +8212,7 @@
                   <a:srgbClr val="1B3B6F"/>
                 </a:solidFill>
                 <a:latin typeface="Amiri" pitchFamily="2" charset="-78"/>
+                <a:ea typeface="Amiri" pitchFamily="2" charset="-78"/>
                 <a:cs typeface="Amiri" pitchFamily="2" charset="-78"/>
               </a:rPr>
               <a:t>أ</a:t>
@@ -8208,6 +8264,7 @@
                   <a:srgbClr val="8A6D1E"/>
                 </a:solidFill>
                 <a:latin typeface="Amiri" pitchFamily="2" charset="-78"/>
+                <a:ea typeface="Amiri" pitchFamily="2" charset="-78"/>
                 <a:cs typeface="Amiri" pitchFamily="2" charset="-78"/>
               </a:rPr>
               <a:t>نَمُوذَجُ الإِجَابَةِ</a:t>
@@ -8321,6 +8378,7 @@
                   <a:srgbClr val="1F2A37"/>
                 </a:solidFill>
                 <a:latin typeface="Amiri" pitchFamily="2" charset="-78"/>
+                <a:ea typeface="Amiri" pitchFamily="2" charset="-78"/>
                 <a:cs typeface="Amiri" pitchFamily="2" charset="-78"/>
               </a:rPr>
               <a:t>أُحَاوِلُ أَنْ أَعِيشَ حَيَاةً صِحِّيَّةً. فِي الصَّبَاحِ آكُلُ الشُّوفَانَ مَعَ المَوْزِ، وَأَشْرَبُ الحَلِيبَ. فِي المَدْرَسَةِ آكُلُ شَطِيرَةً وَتُفَّاحَةً، وَأَشْرَبُ المَاءَ. فِي المَسَاءِ نَأْكُلُ الأُرْزَ وَالخُضَارَ وَالدَّجَاجَ فِي البَيْتِ.</a:t>
@@ -8340,6 +8398,7 @@
                   <a:srgbClr val="1F2A37"/>
                 </a:solidFill>
                 <a:latin typeface="Amiri" pitchFamily="2" charset="-78"/>
+                <a:ea typeface="Amiri" pitchFamily="2" charset="-78"/>
                 <a:cs typeface="Amiri" pitchFamily="2" charset="-78"/>
               </a:rPr>
               <a:t>أُمَارِسُ الرِّيَاضَةَ ثَلَاثَ مَرَّاتٍ فِي الأُسْبُوعِ. أَلْعَبُ كُرَةَ السَّلَّةِ يَوْمَ الإِثْنَيْنِ، وَأَسْبَحُ يَوْمَ الأَرْبِعَاءِ، وَأَمْشِي مَعَ أَبِي يَوْمَ السَّبْتِ. أَنَامُ فِي السَّاعَةِ العَاشِرَةِ عَادَةً، وَأَسْتَيْقِظُ فِي السَّاعَةِ السَّادِسَةِ، لِأَنَّ المَدْرَسَةَ تَبْدَأُ مُبَكِّرًا. الرِّيَاضَةُ تَجْعَلُنِي سَعِيدًا وَنَشِيطًا.</a:t>
@@ -8359,6 +8418,7 @@
                   <a:srgbClr val="1F2A37"/>
                 </a:solidFill>
                 <a:latin typeface="Amiri" pitchFamily="2" charset="-78"/>
+                <a:ea typeface="Amiri" pitchFamily="2" charset="-78"/>
                 <a:cs typeface="Amiri" pitchFamily="2" charset="-78"/>
               </a:rPr>
               <a:t>لٰكِنَّ عِنْدِي عَادَةً سَيِّئَةً، فَأَنَا أُحِبُّ الحَلَوِيَّاتِ كَثِيرًا. أَمْسِ أَكَلْتُ قِطْعَتَيْنِ مِنَ الكَعْكِ، وَشَرِبْتُ مَشْرُوبًا غَازِيًّا، فَشَعَرْتُ بِالتَّعَبِ فِي المَسَاءِ، وَلَمْ أَنَمْ جَيِّدًا.</a:t>
@@ -8378,6 +8438,7 @@
                   <a:srgbClr val="1F2A37"/>
                 </a:solidFill>
                 <a:latin typeface="Amiri" pitchFamily="2" charset="-78"/>
+                <a:ea typeface="Amiri" pitchFamily="2" charset="-78"/>
                 <a:cs typeface="Amiri" pitchFamily="2" charset="-78"/>
               </a:rPr>
               <a:t>فِي رَأْيِي، الأَكْلُ الصِّحِّيُّ وَالرِّيَاضَةُ مُهِمَّانِ جِدًّا. فِي المُسْتَقْبَلِ سَآكُلُ الحَلَوِيَّاتِ مَرَّةً فِي الأُسْبُوعِ فَقَطْ، وَسَأَشْرَبُ المَاءَ أَكْثَرَ، وَسَأَمْشِي إِلَى المَدْرَسَةِ مَعَ أَخِي. يَجِبُ أَنْ نَهْتَمَّ بِصِحَّتِنَا كُلَّ يَوْمٍ.</a:t>
@@ -8541,11 +8602,12 @@
               <a:buNone/>
             </a:pPr>
             <a:r>
-              <a:rPr lang="en-US" sz="950" b="1" dirty="0">
+              <a:rPr lang="ar-SA" sz="950" b="1" dirty="0">
                 <a:solidFill>
                   <a:srgbClr val="FFFFFF"/>
                 </a:solidFill>
                 <a:latin typeface="Calibri" pitchFamily="34" charset="0"/>
+                <a:ea typeface="Amiri" pitchFamily="2" charset="-78"/>
                 <a:cs typeface="Amiri" pitchFamily="2" charset="-78"/>
               </a:rPr>
               <a:t>ثَلَاثَ مَرَّاتٍ</a:t>
@@ -8606,11 +8668,12 @@
               <a:buNone/>
             </a:pPr>
             <a:r>
-              <a:rPr lang="en-US" sz="950" b="1" dirty="0">
+              <a:rPr lang="ar-SA" sz="950" b="1" dirty="0">
                 <a:solidFill>
                   <a:srgbClr val="FFFFFF"/>
                 </a:solidFill>
                 <a:latin typeface="Calibri" pitchFamily="34" charset="0"/>
+                <a:ea typeface="Amiri" pitchFamily="2" charset="-78"/>
                 <a:cs typeface="Amiri" pitchFamily="2" charset="-78"/>
               </a:rPr>
               <a:t>عَادَةً سَيِّئَةً</a:t>
@@ -8671,11 +8734,12 @@
               <a:buNone/>
             </a:pPr>
             <a:r>
-              <a:rPr lang="en-US" sz="950" b="1" dirty="0">
+              <a:rPr lang="ar-SA" sz="950" b="1" dirty="0">
                 <a:solidFill>
                   <a:srgbClr val="FFFFFF"/>
                 </a:solidFill>
                 <a:latin typeface="Calibri" pitchFamily="34" charset="0"/>
+                <a:ea typeface="Amiri" pitchFamily="2" charset="-78"/>
                 <a:cs typeface="Amiri" pitchFamily="2" charset="-78"/>
               </a:rPr>
               <a:t>أَمْسِ أَكَلْتُ</a:t>
@@ -8736,11 +8800,12 @@
               <a:buNone/>
             </a:pPr>
             <a:r>
-              <a:rPr lang="en-US" sz="950" b="1" dirty="0">
+              <a:rPr lang="ar-SA" sz="950" b="1" dirty="0">
                 <a:solidFill>
                   <a:srgbClr val="FFFFFF"/>
                 </a:solidFill>
                 <a:latin typeface="Calibri" pitchFamily="34" charset="0"/>
+                <a:ea typeface="Amiri" pitchFamily="2" charset="-78"/>
                 <a:cs typeface="Amiri" pitchFamily="2" charset="-78"/>
               </a:rPr>
               <a:t>يَجِبُ أَنْ نَهْتَمَّ</a:t>
@@ -8874,6 +8939,7 @@
                   <a:srgbClr val="D4AF37"/>
                 </a:solidFill>
                 <a:latin typeface="Amiri" pitchFamily="2" charset="-78"/>
+                <a:ea typeface="Amiri" pitchFamily="2" charset="-78"/>
                 <a:cs typeface="Amiri" pitchFamily="2" charset="-78"/>
               </a:rPr>
               <a:t>م</a:t>
@@ -9131,6 +9197,7 @@
                   <a:srgbClr val="8A6D1E"/>
                 </a:solidFill>
                 <a:latin typeface="Amiri" pitchFamily="2" charset="-78"/>
+                <a:ea typeface="Amiri" pitchFamily="2" charset="-78"/>
                 <a:cs typeface="Amiri" pitchFamily="2" charset="-78"/>
               </a:rPr>
               <a:t>أ</a:t>
@@ -9195,6 +9262,7 @@
                   <a:srgbClr val="1B3B6F"/>
                 </a:solidFill>
                 <a:latin typeface="Amiri" pitchFamily="2" charset="-78"/>
+                <a:ea typeface="Amiri" pitchFamily="2" charset="-78"/>
                 <a:cs typeface="Amiri" pitchFamily="2" charset="-78"/>
               </a:rPr>
               <a:t>أ</a:t>
@@ -9246,6 +9314,7 @@
                   <a:srgbClr val="8A6D1E"/>
                 </a:solidFill>
                 <a:latin typeface="Amiri" pitchFamily="2" charset="-78"/>
+                <a:ea typeface="Amiri" pitchFamily="2" charset="-78"/>
                 <a:cs typeface="Amiri" pitchFamily="2" charset="-78"/>
               </a:rPr>
               <a:t>نَمُوذَجُ الإِجَابَةِ</a:t>
@@ -9359,6 +9428,7 @@
                   <a:srgbClr val="1F2A37"/>
                 </a:solidFill>
                 <a:latin typeface="Amiri" pitchFamily="2" charset="-78"/>
+                <a:ea typeface="Amiri" pitchFamily="2" charset="-78"/>
                 <a:cs typeface="Amiri" pitchFamily="2" charset="-78"/>
               </a:rPr>
               <a:t>أَحْرِصُ عَلَى أَنْ أَعِيشَ حَيَاةً صِحِّيَّةً مُتَوَازِنَةً. أَبْدَأُ يَوْمِي بِفُطُورٍ مُغَذٍّ مِنَ الشُّوفَانِ وَالفَوَاكِهِ، لِأَنَّهُ يُعْطِينِي الطَّاقَةَ حَتَّى الظُّهْرِ، وَأَشْرَبُ ثَمَانِيَةَ أَكْوَابٍ مِنَ المَاءِ يَوْمِيًّا. أَمَّا الوَجَبَاتُ السَّرِيعَةُ فَلَا آكُلُهَا إِلَّا نَادِرًا، لِأَنَّهَا مَلِيئَةٌ بِالدُّهُونِ وَالسُّكَّرِ وَالمِلْحِ.</a:t>
@@ -9378,6 +9448,7 @@
                   <a:srgbClr val="1F2A37"/>
                 </a:solidFill>
                 <a:latin typeface="Amiri" pitchFamily="2" charset="-78"/>
+                <a:ea typeface="Amiri" pitchFamily="2" charset="-78"/>
                 <a:cs typeface="Amiri" pitchFamily="2" charset="-78"/>
               </a:rPr>
               <a:t>أُمَارِسُ الرِّيَاضَةَ ثَلَاثَ مَرَّاتٍ فِي الأُسْبُوعِ، وَأَمْشِي إِلَى المَدْرَسَةِ بَدَلًا مِنْ أَنْ أَرْكَبَ السَّيَّارَةَ. وَأَنَامُ ثَمَانِيَ سَاعَاتٍ، لِأَنَّ النَّوْمَ يُسَاعِدُنِي عَلَى التَّرْكِيزِ فِي الدُّرُوسِ، وَيَجْعَلُنِي أَهْدَأَ مَعَ أُسْرَتِي وَأَصْدِقَائِي.</a:t>
@@ -9397,6 +9468,7 @@
                   <a:srgbClr val="1F2A37"/>
                 </a:solidFill>
                 <a:latin typeface="Amiri" pitchFamily="2" charset="-78"/>
+                <a:ea typeface="Amiri" pitchFamily="2" charset="-78"/>
                 <a:cs typeface="Amiri" pitchFamily="2" charset="-78"/>
               </a:rPr>
               <a:t>لَمْ أَكُنْ هٰكَذَا دَائِمًا؛ فَقَبْلَ سَنَةٍ كُنْتُ أَشْرَبُ المَشْرُوبَاتِ الغَازِيَّةَ كُلَّ يَوْمٍ، وَأَسْهَرُ عَلَى الهَاتِفِ حَتَّى مُنْتَصَفِ اللَّيْلِ، فَكُنْتُ أَشْعُرُ بِالتَّعَبِ دَائِمًا. ثُمَّ نَصَحَنِي طَبِيبُ المَدْرَسَةِ بِأَنْ أُغَيِّرَ عَادَاتِي، فَفَعَلْتُ خُطْوَةً خُطْوَةً، وَبَدَأْتُ بِالمَاءِ ثُمَّ بِالنَّوْمِ.</a:t>
@@ -9416,6 +9488,7 @@
                   <a:srgbClr val="1F2A37"/>
                 </a:solidFill>
                 <a:latin typeface="Amiri" pitchFamily="2" charset="-78"/>
+                <a:ea typeface="Amiri" pitchFamily="2" charset="-78"/>
                 <a:cs typeface="Amiri" pitchFamily="2" charset="-78"/>
               </a:rPr>
               <a:t>صَحِيحٌ أَنَّ التَّغْيِيرَ كَانَ صَعْبًا فِي البِدَايَةِ، غَيْرَ أَنَّنِي الآنَ أَنْشَطُ وَأَسْعَدُ. فِي المُسْتَقْبَلِ سَأَتَعَلَّمُ طَبْخَ وَجَبَاتٍ صِحِّيَّةٍ، وَلَوْ تَبِعَ كُلُّ الطُّلَّابِ هٰذِهِ النَّصَائِحَ، لَتَحَسَّنَتْ صِحَّتُهُمْ وَنَتَائِجُهُمْ مَعًا.</a:t>
@@ -9514,11 +9587,12 @@
               <a:buNone/>
             </a:pPr>
             <a:r>
-              <a:rPr lang="en-US" sz="950" b="1" dirty="0">
+              <a:rPr lang="ar-SA" sz="950" b="1" dirty="0">
                 <a:solidFill>
                   <a:srgbClr val="FFFFFF"/>
                 </a:solidFill>
                 <a:latin typeface="Calibri" pitchFamily="34" charset="0"/>
+                <a:ea typeface="Amiri" pitchFamily="2" charset="-78"/>
                 <a:cs typeface="Amiri" pitchFamily="2" charset="-78"/>
               </a:rPr>
               <a:t>أَمَّا الوَجَبَاتُ السَّرِيعَةُ فَلَا</a:t>
@@ -9579,11 +9653,12 @@
               <a:buNone/>
             </a:pPr>
             <a:r>
-              <a:rPr lang="en-US" sz="950" b="1" dirty="0">
+              <a:rPr lang="ar-SA" sz="950" b="1" dirty="0">
                 <a:solidFill>
                   <a:srgbClr val="FFFFFF"/>
                 </a:solidFill>
                 <a:latin typeface="Calibri" pitchFamily="34" charset="0"/>
+                <a:ea typeface="Amiri" pitchFamily="2" charset="-78"/>
                 <a:cs typeface="Amiri" pitchFamily="2" charset="-78"/>
               </a:rPr>
               <a:t>كُنْتُ أَشْرَبُ</a:t>
@@ -9644,11 +9719,12 @@
               <a:buNone/>
             </a:pPr>
             <a:r>
-              <a:rPr lang="en-US" sz="950" b="1" dirty="0">
+              <a:rPr lang="ar-SA" sz="950" b="1" dirty="0">
                 <a:solidFill>
                   <a:srgbClr val="FFFFFF"/>
                 </a:solidFill>
                 <a:latin typeface="Calibri" pitchFamily="34" charset="0"/>
+                <a:ea typeface="Amiri" pitchFamily="2" charset="-78"/>
                 <a:cs typeface="Amiri" pitchFamily="2" charset="-78"/>
               </a:rPr>
               <a:t>نَصَحَنِي … بِأَنْ أُغَيِّرَ</a:t>
@@ -9709,11 +9785,12 @@
               <a:buNone/>
             </a:pPr>
             <a:r>
-              <a:rPr lang="en-US" sz="950" b="1" dirty="0">
+              <a:rPr lang="ar-SA" sz="950" b="1" dirty="0">
                 <a:solidFill>
                   <a:srgbClr val="FFFFFF"/>
                 </a:solidFill>
                 <a:latin typeface="Calibri" pitchFamily="34" charset="0"/>
+                <a:ea typeface="Amiri" pitchFamily="2" charset="-78"/>
                 <a:cs typeface="Amiri" pitchFamily="2" charset="-78"/>
               </a:rPr>
               <a:t>لَوْ تَبِعَ … لَتَحَسَّنَتْ</a:t>
@@ -9847,6 +9924,7 @@
                   <a:srgbClr val="D4AF37"/>
                 </a:solidFill>
                 <a:latin typeface="Amiri" pitchFamily="2" charset="-78"/>
+                <a:ea typeface="Amiri" pitchFamily="2" charset="-78"/>
                 <a:cs typeface="Amiri" pitchFamily="2" charset="-78"/>
               </a:rPr>
               <a:t>م</a:t>
@@ -10104,6 +10182,7 @@
                   <a:srgbClr val="8A6D1E"/>
                 </a:solidFill>
                 <a:latin typeface="Amiri" pitchFamily="2" charset="-78"/>
+                <a:ea typeface="Amiri" pitchFamily="2" charset="-78"/>
                 <a:cs typeface="Amiri" pitchFamily="2" charset="-78"/>
               </a:rPr>
               <a:t>ب</a:t>
@@ -10168,6 +10247,7 @@
                   <a:srgbClr val="1B3B6F"/>
                 </a:solidFill>
                 <a:latin typeface="Amiri" pitchFamily="2" charset="-78"/>
+                <a:ea typeface="Amiri" pitchFamily="2" charset="-78"/>
                 <a:cs typeface="Amiri" pitchFamily="2" charset="-78"/>
               </a:rPr>
               <a:t>ب</a:t>
@@ -10219,6 +10299,7 @@
                   <a:srgbClr val="8A6D1E"/>
                 </a:solidFill>
                 <a:latin typeface="Amiri" pitchFamily="2" charset="-78"/>
+                <a:ea typeface="Amiri" pitchFamily="2" charset="-78"/>
                 <a:cs typeface="Amiri" pitchFamily="2" charset="-78"/>
               </a:rPr>
               <a:t>نَمُوذَجُ الإِجَابَةِ</a:t>
@@ -10332,6 +10413,7 @@
                   <a:srgbClr val="1F2A37"/>
                 </a:solidFill>
                 <a:latin typeface="Amiri" pitchFamily="2" charset="-78"/>
+                <a:ea typeface="Amiri" pitchFamily="2" charset="-78"/>
                 <a:cs typeface="Amiri" pitchFamily="2" charset="-78"/>
               </a:rPr>
               <a:t>تُوَاجِهُ صِحَّةُ الشَّبَابِ اليَوْمَ تَحَدِّيَاتٍ كَثِيرَةً. فِي المَاضِي كَانَ الأَطْفَالُ يَلْعَبُونَ فِي الشَّوَارِعِ وَالحَدَائِقِ سَاعَاتٍ طَوِيلَةً، أَمَّا اليَوْمَ فَكَثِيرٌ مِنْهُمْ يَجْلِسُونَ أَمَامَ الشَّاشَاتِ، وَيَأْكُلُونَ الوَجَبَاتِ السَّرِيعَةَ المَلِيئَةَ بِالدُّهُونِ وَالسُّكَّرِ.</a:t>
@@ -10351,6 +10433,7 @@
                   <a:srgbClr val="1F2A37"/>
                 </a:solidFill>
                 <a:latin typeface="Amiri" pitchFamily="2" charset="-78"/>
+                <a:ea typeface="Amiri" pitchFamily="2" charset="-78"/>
                 <a:cs typeface="Amiri" pitchFamily="2" charset="-78"/>
               </a:rPr>
               <a:t>يَرَى بَعْضُ النَّاسِ أَنَّ المَسْؤُولِيَّةَ عَلَى الأُسْرَةِ، وَيَرَى آخَرُونَ أَنَّهَا عَلَى المَدْرَسَةِ. فِي رَأْيِي، كِلَاهُمَا مَسْؤُولٌ؛ فَيَجِبُ أَنْ تُقَدِّمَ الأُسْرَةُ طَعَامًا صِحِّيًّا فِي البَيْتِ، وَيَنْبَغِي أَنْ تُعَلِّمَ المَدْرَسَةُ الطُّلَّابَ أَهَمِّيَّةَ الرِّيَاضَةِ وَالنَّوْمِ، وَأَنْ تُقَدِّمَ فِي المَقْصَفِ وَجَبَاتٍ صِحِّيَّةً بِأَسْعَارٍ مُنَاسِبَةٍ.</a:t>
@@ -10370,6 +10453,7 @@
                   <a:srgbClr val="1F2A37"/>
                 </a:solidFill>
                 <a:latin typeface="Amiri" pitchFamily="2" charset="-78"/>
+                <a:ea typeface="Amiri" pitchFamily="2" charset="-78"/>
                 <a:cs typeface="Amiri" pitchFamily="2" charset="-78"/>
               </a:rPr>
               <a:t>فِي الشَّهْرِ المَاضِي شَارَكْتُ فِي حَمْلَةٍ صِحِّيَّةٍ فِي مَدْرَسَتِي؛ نَظَّمْنَا يَوْمًا لِلْفَوَاكِهِ، وَوَزَّعْنَا مَلْصَقَاتٍ عَنْ أَضْرَارِ السُّكَّرِ، وَلَاحَظْنَا أَنَّ كَثِيرًا مِنَ الطُّلَّابِ صَارُوا يَشْرَبُونَ المَاءَ بَدَلًا مِنَ المَشْرُوبَاتِ الغَازِيَّةِ، وَأَنَّ المُعَلِّمِينَ أَيْضًا شَارَكُوا بِحَمَاسٍ كَبِيرٍ.</a:t>
@@ -10389,6 +10473,7 @@
                   <a:srgbClr val="1F2A37"/>
                 </a:solidFill>
                 <a:latin typeface="Amiri" pitchFamily="2" charset="-78"/>
+                <a:ea typeface="Amiri" pitchFamily="2" charset="-78"/>
                 <a:cs typeface="Amiri" pitchFamily="2" charset="-78"/>
               </a:rPr>
               <a:t>صَحِيحٌ أَنَّ تَغْيِيرَ العَادَاتِ صَعْبٌ، غَيْرَ أَنَّهُ مُمْكِنٌ إِذَا بَدَأْنَا بِخُطُوَاتٍ صَغِيرَةٍ وَصَبَرْنَا قَلِيلًا. وَلَوِ اهْتَمَّ كُلُّ شَابٍّ بِصِحَّتِهِ قَلِيلًا كُلَّ يَوْمٍ، لَأَصْبَحَ المُجْتَمَعُ كُلُّهُ أَقْوَى وَأَسْعَدَ.</a:t>
@@ -10487,11 +10572,12 @@
               <a:buNone/>
             </a:pPr>
             <a:r>
-              <a:rPr lang="en-US" sz="950" b="1" dirty="0">
+              <a:rPr lang="ar-SA" sz="950" b="1" dirty="0">
                 <a:solidFill>
                   <a:srgbClr val="FFFFFF"/>
                 </a:solidFill>
                 <a:latin typeface="Calibri" pitchFamily="34" charset="0"/>
+                <a:ea typeface="Amiri" pitchFamily="2" charset="-78"/>
                 <a:cs typeface="Amiri" pitchFamily="2" charset="-78"/>
               </a:rPr>
               <a:t>كَانَ الأَطْفَالُ يَلْعَبُونَ</a:t>
@@ -10552,11 +10638,12 @@
               <a:buNone/>
             </a:pPr>
             <a:r>
-              <a:rPr lang="en-US" sz="950" b="1" dirty="0">
+              <a:rPr lang="ar-SA" sz="950" b="1" dirty="0">
                 <a:solidFill>
                   <a:srgbClr val="FFFFFF"/>
                 </a:solidFill>
                 <a:latin typeface="Calibri" pitchFamily="34" charset="0"/>
+                <a:ea typeface="Amiri" pitchFamily="2" charset="-78"/>
                 <a:cs typeface="Amiri" pitchFamily="2" charset="-78"/>
               </a:rPr>
               <a:t>يَرَى بَعْضُ النَّاسِ … وَيَرَى آخَرُونَ</a:t>
@@ -10617,11 +10704,12 @@
               <a:buNone/>
             </a:pPr>
             <a:r>
-              <a:rPr lang="en-US" sz="950" b="1" dirty="0">
+              <a:rPr lang="ar-SA" sz="950" b="1" dirty="0">
                 <a:solidFill>
                   <a:srgbClr val="FFFFFF"/>
                 </a:solidFill>
                 <a:latin typeface="Calibri" pitchFamily="34" charset="0"/>
+                <a:ea typeface="Amiri" pitchFamily="2" charset="-78"/>
                 <a:cs typeface="Amiri" pitchFamily="2" charset="-78"/>
               </a:rPr>
               <a:t>يَجِبُ أَنْ تُقَدِّمَ</a:t>
@@ -10682,11 +10770,12 @@
               <a:buNone/>
             </a:pPr>
             <a:r>
-              <a:rPr lang="en-US" sz="950" b="1" dirty="0">
+              <a:rPr lang="ar-SA" sz="950" b="1" dirty="0">
                 <a:solidFill>
                   <a:srgbClr val="FFFFFF"/>
                 </a:solidFill>
                 <a:latin typeface="Calibri" pitchFamily="34" charset="0"/>
+                <a:ea typeface="Amiri" pitchFamily="2" charset="-78"/>
                 <a:cs typeface="Amiri" pitchFamily="2" charset="-78"/>
               </a:rPr>
               <a:t>لَوِ اهْتَمَّ … لَأَصْبَحَ</a:t>
@@ -10820,6 +10909,7 @@
                   <a:srgbClr val="D4AF37"/>
                 </a:solidFill>
                 <a:latin typeface="Amiri" pitchFamily="2" charset="-78"/>
+                <a:ea typeface="Amiri" pitchFamily="2" charset="-78"/>
                 <a:cs typeface="Amiri" pitchFamily="2" charset="-78"/>
               </a:rPr>
               <a:t>م</a:t>
@@ -11140,6 +11230,7 @@
                   <a:srgbClr val="8A6D1E"/>
                 </a:solidFill>
                 <a:latin typeface="Amiri" pitchFamily="2" charset="-78"/>
+                <a:ea typeface="Amiri" pitchFamily="2" charset="-78"/>
                 <a:cs typeface="Amiri" pitchFamily="2" charset="-78"/>
               </a:rPr>
               <a:t>قَيِّمْ عَمَلَكَ</a:t>
@@ -12384,6 +12475,7 @@
                   <a:srgbClr val="FFFFFF"/>
                 </a:solidFill>
                 <a:latin typeface="Amiri" pitchFamily="2" charset="-78"/>
+                <a:ea typeface="Amiri" pitchFamily="2" charset="-78"/>
                 <a:cs typeface="Amiri" pitchFamily="2" charset="-78"/>
               </a:rPr>
               <a:t>أَحْسَنْتُمْ! إِلَى اللِّقَاءِ</a:t>
@@ -12536,6 +12628,7 @@
                   <a:srgbClr val="D4AF37"/>
                 </a:solidFill>
                 <a:latin typeface="Amiri" pitchFamily="2" charset="-78"/>
+                <a:ea typeface="Amiri" pitchFamily="2" charset="-78"/>
                 <a:cs typeface="Amiri" pitchFamily="2" charset="-78"/>
               </a:rPr>
               <a:t>وَرْشَةُ التَّدْرِيبِ</a:t>
@@ -12669,6 +12762,7 @@
                   <a:srgbClr val="D4AF37"/>
                 </a:solidFill>
                 <a:latin typeface="Amiri" pitchFamily="2" charset="-78"/>
+                <a:ea typeface="Amiri" pitchFamily="2" charset="-78"/>
                 <a:cs typeface="Amiri" pitchFamily="2" charset="-78"/>
               </a:rPr>
               <a:t>م</a:t>
@@ -12989,6 +13083,7 @@
                   <a:srgbClr val="8A6D1E"/>
                 </a:solidFill>
                 <a:latin typeface="Amiri" pitchFamily="2" charset="-78"/>
+                <a:ea typeface="Amiri" pitchFamily="2" charset="-78"/>
                 <a:cs typeface="Amiri" pitchFamily="2" charset="-78"/>
               </a:rPr>
               <a:t>آدَابُ الصَّفِّ</a:t>
@@ -14520,6 +14615,7 @@
                   <a:srgbClr val="D4AF37"/>
                 </a:solidFill>
                 <a:latin typeface="Amiri" pitchFamily="2" charset="-78"/>
+                <a:ea typeface="Amiri" pitchFamily="2" charset="-78"/>
                 <a:cs typeface="Amiri" pitchFamily="2" charset="-78"/>
               </a:rPr>
               <a:t>م</a:t>
@@ -14840,6 +14936,7 @@
                   <a:srgbClr val="8A6D1E"/>
                 </a:solidFill>
                 <a:latin typeface="Amiri" pitchFamily="2" charset="-78"/>
+                <a:ea typeface="Amiri" pitchFamily="2" charset="-78"/>
                 <a:cs typeface="Amiri" pitchFamily="2" charset="-78"/>
               </a:rPr>
               <a:t>خَرِيطَةُ الوَرْشَةِ</a:t>
@@ -15154,6 +15251,7 @@
                   <a:srgbClr val="1B3B6F"/>
                 </a:solidFill>
                 <a:latin typeface="Amiri" pitchFamily="2" charset="-78"/>
+                <a:ea typeface="Amiri" pitchFamily="2" charset="-78"/>
                 <a:cs typeface="Amiri" pitchFamily="2" charset="-78"/>
               </a:rPr>
               <a:t>كَيْفَ</a:t>
@@ -15430,6 +15528,7 @@
                   <a:srgbClr val="1E6B52"/>
                 </a:solidFill>
                 <a:latin typeface="Amiri" pitchFamily="2" charset="-78"/>
+                <a:ea typeface="Amiri" pitchFamily="2" charset="-78"/>
                 <a:cs typeface="Amiri" pitchFamily="2" charset="-78"/>
               </a:rPr>
               <a:t>الاسْتِمَارَةُ</a:t>
@@ -15706,6 +15805,7 @@
                   <a:srgbClr val="1E6B52"/>
                 </a:solidFill>
                 <a:latin typeface="Amiri" pitchFamily="2" charset="-78"/>
+                <a:ea typeface="Amiri" pitchFamily="2" charset="-78"/>
                 <a:cs typeface="Amiri" pitchFamily="2" charset="-78"/>
               </a:rPr>
               <a:t>الرِّسَالَةُ</a:t>
@@ -15982,6 +16082,7 @@
                   <a:srgbClr val="1E6B52"/>
                 </a:solidFill>
                 <a:latin typeface="Amiri" pitchFamily="2" charset="-78"/>
+                <a:ea typeface="Amiri" pitchFamily="2" charset="-78"/>
                 <a:cs typeface="Amiri" pitchFamily="2" charset="-78"/>
               </a:rPr>
               <a:t>المَقَالُ</a:t>
@@ -16258,6 +16359,7 @@
                   <a:srgbClr val="8A6D1E"/>
                 </a:solidFill>
                 <a:latin typeface="Amiri" pitchFamily="2" charset="-78"/>
+                <a:ea typeface="Amiri" pitchFamily="2" charset="-78"/>
                 <a:cs typeface="Amiri" pitchFamily="2" charset="-78"/>
               </a:rPr>
               <a:t>قَيِّمْ</a:t>
@@ -16501,6 +16603,7 @@
                   <a:srgbClr val="D4AF37"/>
                 </a:solidFill>
                 <a:latin typeface="Amiri" pitchFamily="2" charset="-78"/>
+                <a:ea typeface="Amiri" pitchFamily="2" charset="-78"/>
                 <a:cs typeface="Amiri" pitchFamily="2" charset="-78"/>
               </a:rPr>
               <a:t>م</a:t>
@@ -16821,6 +16924,7 @@
                   <a:srgbClr val="8A6D1E"/>
                 </a:solidFill>
                 <a:latin typeface="Amiri" pitchFamily="2" charset="-78"/>
+                <a:ea typeface="Amiri" pitchFamily="2" charset="-78"/>
                 <a:cs typeface="Amiri" pitchFamily="2" charset="-78"/>
               </a:rPr>
               <a:t>امْتِحَانُ الكِتَابَةِ</a:t>
@@ -17445,6 +17549,7 @@
                   <a:srgbClr val="1B3B6F"/>
                 </a:solidFill>
                 <a:latin typeface="Amiri" pitchFamily="2" charset="-78"/>
+                <a:ea typeface="Amiri" pitchFamily="2" charset="-78"/>
                 <a:cs typeface="Amiri" pitchFamily="2" charset="-78"/>
               </a:rPr>
               <a:t>يَجِبُ أَنْ نَشْرَبَ · يَنْبَغِي أَلَّا نَأْكُلَ</a:t>
@@ -17544,6 +17649,7 @@
                   <a:srgbClr val="1B3B6F"/>
                 </a:solidFill>
                 <a:latin typeface="Amiri" pitchFamily="2" charset="-78"/>
+                <a:ea typeface="Amiri" pitchFamily="2" charset="-78"/>
                 <a:cs typeface="Amiri" pitchFamily="2" charset="-78"/>
               </a:rPr>
               <a:t>لِأَنَّ … · لِكَيْ …</a:t>
@@ -17643,6 +17749,7 @@
                   <a:srgbClr val="1B3B6F"/>
                 </a:solidFill>
                 <a:latin typeface="Amiri" pitchFamily="2" charset="-78"/>
+                <a:ea typeface="Amiri" pitchFamily="2" charset="-78"/>
                 <a:cs typeface="Amiri" pitchFamily="2" charset="-78"/>
               </a:rPr>
               <a:t>كُنْتُ … أَمَّا الآنَ فَأُمَارِسُ …</a:t>
@@ -17814,6 +17921,7 @@
                   <a:srgbClr val="D4AF37"/>
                 </a:solidFill>
                 <a:latin typeface="Amiri" pitchFamily="2" charset="-78"/>
+                <a:ea typeface="Amiri" pitchFamily="2" charset="-78"/>
                 <a:cs typeface="Amiri" pitchFamily="2" charset="-78"/>
               </a:rPr>
               <a:t>م</a:t>
@@ -18134,6 +18242,7 @@
                   <a:srgbClr val="8A6D1E"/>
                 </a:solidFill>
                 <a:latin typeface="Amiri" pitchFamily="2" charset="-78"/>
+                <a:ea typeface="Amiri" pitchFamily="2" charset="-78"/>
                 <a:cs typeface="Amiri" pitchFamily="2" charset="-78"/>
               </a:rPr>
               <a:t>اسْتِبْيَانٌ صِحِّيٌّ</a:t>
@@ -18490,6 +18599,7 @@
                   <a:srgbClr val="1B3B6F"/>
                 </a:solidFill>
                 <a:latin typeface="Amiri" pitchFamily="2" charset="-78"/>
+                <a:ea typeface="Amiri" pitchFamily="2" charset="-78"/>
                 <a:cs typeface="Amiri" pitchFamily="2" charset="-78"/>
               </a:rPr>
               <a:t>الاسْمُ</a:t>
@@ -18734,6 +18844,7 @@
                   <a:srgbClr val="1B3B6F"/>
                 </a:solidFill>
                 <a:latin typeface="Amiri" pitchFamily="2" charset="-78"/>
+                <a:ea typeface="Amiri" pitchFamily="2" charset="-78"/>
                 <a:cs typeface="Amiri" pitchFamily="2" charset="-78"/>
               </a:rPr>
               <a:t>العُمْرُ</a:t>
@@ -18978,6 +19089,7 @@
                   <a:srgbClr val="1B3B6F"/>
                 </a:solidFill>
                 <a:latin typeface="Amiri" pitchFamily="2" charset="-78"/>
+                <a:ea typeface="Amiri" pitchFamily="2" charset="-78"/>
                 <a:cs typeface="Amiri" pitchFamily="2" charset="-78"/>
               </a:rPr>
               <a:t>رِيَاضَتُكَ المُفَضَّلَةُ</a:t>
@@ -19222,6 +19334,7 @@
                   <a:srgbClr val="1B3B6F"/>
                 </a:solidFill>
                 <a:latin typeface="Amiri" pitchFamily="2" charset="-78"/>
+                <a:ea typeface="Amiri" pitchFamily="2" charset="-78"/>
                 <a:cs typeface="Amiri" pitchFamily="2" charset="-78"/>
               </a:rPr>
               <a:t>كَمْ مَرَّةً تُمَارِسُ الرِّيَاضَةَ؟</a:t>
@@ -19466,6 +19579,7 @@
                   <a:srgbClr val="1B3B6F"/>
                 </a:solidFill>
                 <a:latin typeface="Amiri" pitchFamily="2" charset="-78"/>
+                <a:ea typeface="Amiri" pitchFamily="2" charset="-78"/>
                 <a:cs typeface="Amiri" pitchFamily="2" charset="-78"/>
               </a:rPr>
               <a:t>كَمْ سَاعَةً تَنَامُ؟</a:t>
@@ -19710,6 +19824,7 @@
                   <a:srgbClr val="1B3B6F"/>
                 </a:solidFill>
                 <a:latin typeface="Amiri" pitchFamily="2" charset="-78"/>
+                <a:ea typeface="Amiri" pitchFamily="2" charset="-78"/>
                 <a:cs typeface="Amiri" pitchFamily="2" charset="-78"/>
               </a:rPr>
               <a:t>طَعَامٌ صِحِّيٌّ تُحِبُّهُ</a:t>
@@ -19954,6 +20069,7 @@
                   <a:srgbClr val="1B3B6F"/>
                 </a:solidFill>
                 <a:latin typeface="Amiri" pitchFamily="2" charset="-78"/>
+                <a:ea typeface="Amiri" pitchFamily="2" charset="-78"/>
                 <a:cs typeface="Amiri" pitchFamily="2" charset="-78"/>
               </a:rPr>
               <a:t>عَادَةٌ غَيْرُ صِحِّيَّةٍ عِنْدَكَ</a:t>
@@ -20133,6 +20249,7 @@
                   <a:srgbClr val="1B3B6F"/>
                 </a:solidFill>
                 <a:latin typeface="Amiri" pitchFamily="2" charset="-78"/>
+                <a:ea typeface="Amiri" pitchFamily="2" charset="-78"/>
                 <a:cs typeface="Amiri" pitchFamily="2" charset="-78"/>
               </a:rPr>
               <a:t>جُمْلَةٌ: مَاذَا تُرِيدُ أَنْ تُحَسِّنَ؟</a:t>
@@ -20342,6 +20459,7 @@
                   <a:srgbClr val="D4AF37"/>
                 </a:solidFill>
                 <a:latin typeface="Amiri" pitchFamily="2" charset="-78"/>
+                <a:ea typeface="Amiri" pitchFamily="2" charset="-78"/>
                 <a:cs typeface="Amiri" pitchFamily="2" charset="-78"/>
               </a:rPr>
               <a:t>م</a:t>
@@ -20662,6 +20780,7 @@
                   <a:srgbClr val="8A6D1E"/>
                 </a:solidFill>
                 <a:latin typeface="Amiri" pitchFamily="2" charset="-78"/>
+                <a:ea typeface="Amiri" pitchFamily="2" charset="-78"/>
                 <a:cs typeface="Amiri" pitchFamily="2" charset="-78"/>
               </a:rPr>
               <a:t>نَمُوذَجُ الإِجَابَةِ</a:t>
@@ -20980,6 +21099,7 @@
                   <a:srgbClr val="1B3B6F"/>
                 </a:solidFill>
                 <a:latin typeface="Amiri" pitchFamily="2" charset="-78"/>
+                <a:ea typeface="Amiri" pitchFamily="2" charset="-78"/>
                 <a:cs typeface="Amiri" pitchFamily="2" charset="-78"/>
               </a:rPr>
               <a:t>خَالِدٌ يُوسُفُ</a:t>
@@ -21018,6 +21138,7 @@
                   <a:srgbClr val="1B3B6F"/>
                 </a:solidFill>
                 <a:latin typeface="Amiri" pitchFamily="2" charset="-78"/>
+                <a:ea typeface="Amiri" pitchFamily="2" charset="-78"/>
                 <a:cs typeface="Amiri" pitchFamily="2" charset="-78"/>
               </a:rPr>
               <a:t>الاسْمُ</a:t>
@@ -21159,6 +21280,7 @@
                   <a:srgbClr val="1B3B6F"/>
                 </a:solidFill>
                 <a:latin typeface="Amiri" pitchFamily="2" charset="-78"/>
+                <a:ea typeface="Amiri" pitchFamily="2" charset="-78"/>
                 <a:cs typeface="Amiri" pitchFamily="2" charset="-78"/>
               </a:rPr>
               <a:t>سِتَّ عَشْرَةَ سَنَةً</a:t>
@@ -21197,6 +21319,7 @@
                   <a:srgbClr val="1B3B6F"/>
                 </a:solidFill>
                 <a:latin typeface="Amiri" pitchFamily="2" charset="-78"/>
+                <a:ea typeface="Amiri" pitchFamily="2" charset="-78"/>
                 <a:cs typeface="Amiri" pitchFamily="2" charset="-78"/>
               </a:rPr>
               <a:t>العُمْرُ</a:t>
@@ -21338,6 +21461,7 @@
                   <a:srgbClr val="1B3B6F"/>
                 </a:solidFill>
                 <a:latin typeface="Amiri" pitchFamily="2" charset="-78"/>
+                <a:ea typeface="Amiri" pitchFamily="2" charset="-78"/>
                 <a:cs typeface="Amiri" pitchFamily="2" charset="-78"/>
               </a:rPr>
               <a:t>السِّبَاحَةُ</a:t>
@@ -21376,6 +21500,7 @@
                   <a:srgbClr val="1B3B6F"/>
                 </a:solidFill>
                 <a:latin typeface="Amiri" pitchFamily="2" charset="-78"/>
+                <a:ea typeface="Amiri" pitchFamily="2" charset="-78"/>
                 <a:cs typeface="Amiri" pitchFamily="2" charset="-78"/>
               </a:rPr>
               <a:t>رِيَاضَتُكَ المُفَضَّلَةُ</a:t>
@@ -21517,6 +21642,7 @@
                   <a:srgbClr val="1B3B6F"/>
                 </a:solidFill>
                 <a:latin typeface="Amiri" pitchFamily="2" charset="-78"/>
+                <a:ea typeface="Amiri" pitchFamily="2" charset="-78"/>
                 <a:cs typeface="Amiri" pitchFamily="2" charset="-78"/>
               </a:rPr>
               <a:t>ثَلَاثَ مَرَّاتٍ فِي الأُسْبُوعِ</a:t>
@@ -21555,6 +21681,7 @@
                   <a:srgbClr val="1B3B6F"/>
                 </a:solidFill>
                 <a:latin typeface="Amiri" pitchFamily="2" charset="-78"/>
+                <a:ea typeface="Amiri" pitchFamily="2" charset="-78"/>
                 <a:cs typeface="Amiri" pitchFamily="2" charset="-78"/>
               </a:rPr>
               <a:t>كَمْ مَرَّةً تُمَارِسُ الرِّيَاضَةَ؟</a:t>
@@ -21696,6 +21823,7 @@
                   <a:srgbClr val="1B3B6F"/>
                 </a:solidFill>
                 <a:latin typeface="Amiri" pitchFamily="2" charset="-78"/>
+                <a:ea typeface="Amiri" pitchFamily="2" charset="-78"/>
                 <a:cs typeface="Amiri" pitchFamily="2" charset="-78"/>
               </a:rPr>
               <a:t>ثَمَانِيَ سَاعَاتٍ</a:t>
@@ -21734,6 +21862,7 @@
                   <a:srgbClr val="1B3B6F"/>
                 </a:solidFill>
                 <a:latin typeface="Amiri" pitchFamily="2" charset="-78"/>
+                <a:ea typeface="Amiri" pitchFamily="2" charset="-78"/>
                 <a:cs typeface="Amiri" pitchFamily="2" charset="-78"/>
               </a:rPr>
               <a:t>كَمْ سَاعَةً تَنَامُ؟</a:t>
@@ -21875,6 +22004,7 @@
                   <a:srgbClr val="1B3B6F"/>
                 </a:solidFill>
                 <a:latin typeface="Amiri" pitchFamily="2" charset="-78"/>
+                <a:ea typeface="Amiri" pitchFamily="2" charset="-78"/>
                 <a:cs typeface="Amiri" pitchFamily="2" charset="-78"/>
               </a:rPr>
               <a:t>السَّلَطَةُ</a:t>
@@ -21913,6 +22043,7 @@
                   <a:srgbClr val="1B3B6F"/>
                 </a:solidFill>
                 <a:latin typeface="Amiri" pitchFamily="2" charset="-78"/>
+                <a:ea typeface="Amiri" pitchFamily="2" charset="-78"/>
                 <a:cs typeface="Amiri" pitchFamily="2" charset="-78"/>
               </a:rPr>
               <a:t>طَعَامٌ صِحِّيٌّ تُحِبُّهُ</a:t>
@@ -22054,6 +22185,7 @@
                   <a:srgbClr val="1B3B6F"/>
                 </a:solidFill>
                 <a:latin typeface="Amiri" pitchFamily="2" charset="-78"/>
+                <a:ea typeface="Amiri" pitchFamily="2" charset="-78"/>
                 <a:cs typeface="Amiri" pitchFamily="2" charset="-78"/>
               </a:rPr>
               <a:t>السَّهَرُ عَلَى الهَاتِفِ</a:t>
@@ -22092,6 +22224,7 @@
                   <a:srgbClr val="1B3B6F"/>
                 </a:solidFill>
                 <a:latin typeface="Amiri" pitchFamily="2" charset="-78"/>
+                <a:ea typeface="Amiri" pitchFamily="2" charset="-78"/>
                 <a:cs typeface="Amiri" pitchFamily="2" charset="-78"/>
               </a:rPr>
               <a:t>عَادَةٌ غَيْرُ صِحِّيَّةٍ عِنْدَكَ</a:t>
@@ -22233,6 +22366,7 @@
                   <a:srgbClr val="1B3B6F"/>
                 </a:solidFill>
                 <a:latin typeface="Amiri" pitchFamily="2" charset="-78"/>
+                <a:ea typeface="Amiri" pitchFamily="2" charset="-78"/>
                 <a:cs typeface="Amiri" pitchFamily="2" charset="-78"/>
               </a:rPr>
               <a:t>أُرِيدُ أَنْ أَنَامَ مُبَكِّرًا لِكَيْ أَكُونَ نَشِيطًا فِي الصَّبَاحِ.</a:t>
@@ -22271,6 +22405,7 @@
                   <a:srgbClr val="1B3B6F"/>
                 </a:solidFill>
                 <a:latin typeface="Amiri" pitchFamily="2" charset="-78"/>
+                <a:ea typeface="Amiri" pitchFamily="2" charset="-78"/>
                 <a:cs typeface="Amiri" pitchFamily="2" charset="-78"/>
               </a:rPr>
               <a:t>جُمْلَةٌ: مَاذَا تُرِيدُ أَنْ تُحَسِّنَ؟</a:t>
@@ -22480,6 +22615,7 @@
                   <a:srgbClr val="D4AF37"/>
                 </a:solidFill>
                 <a:latin typeface="Amiri" pitchFamily="2" charset="-78"/>
+                <a:ea typeface="Amiri" pitchFamily="2" charset="-78"/>
                 <a:cs typeface="Amiri" pitchFamily="2" charset="-78"/>
               </a:rPr>
               <a:t>م</a:t>
@@ -22800,6 +22936,7 @@
                   <a:srgbClr val="8A6D1E"/>
                 </a:solidFill>
                 <a:latin typeface="Amiri" pitchFamily="2" charset="-78"/>
+                <a:ea typeface="Amiri" pitchFamily="2" charset="-78"/>
                 <a:cs typeface="Amiri" pitchFamily="2" charset="-78"/>
               </a:rPr>
               <a:t>رِسَالَةٌ عَنِ الصِّحَّةِ</a:t>
@@ -23275,6 +23412,7 @@
                   <a:srgbClr val="1B3B6F"/>
                 </a:solidFill>
                 <a:latin typeface="Amiri" pitchFamily="2" charset="-78"/>
+                <a:ea typeface="Amiri" pitchFamily="2" charset="-78"/>
                 <a:cs typeface="Amiri" pitchFamily="2" charset="-78"/>
               </a:rPr>
               <a:t>أَحْرِصُ عَلَى أَنْ …</a:t>
@@ -23351,6 +23489,7 @@
                   <a:srgbClr val="1B3B6F"/>
                 </a:solidFill>
                 <a:latin typeface="Amiri" pitchFamily="2" charset="-78"/>
+                <a:ea typeface="Amiri" pitchFamily="2" charset="-78"/>
                 <a:cs typeface="Amiri" pitchFamily="2" charset="-78"/>
               </a:rPr>
               <a:t>أُمَارِسُ … مَرَّتَيْنِ فِي الأُسْبُوعِ</a:t>
@@ -23427,6 +23566,7 @@
                   <a:srgbClr val="1B3B6F"/>
                 </a:solidFill>
                 <a:latin typeface="Amiri" pitchFamily="2" charset="-78"/>
+                <a:ea typeface="Amiri" pitchFamily="2" charset="-78"/>
                 <a:cs typeface="Amiri" pitchFamily="2" charset="-78"/>
               </a:rPr>
               <a:t>لٰكِنَّ عِنْدِي عَادَةً سَيِّئَةً</a:t>
@@ -23503,6 +23643,7 @@
                   <a:srgbClr val="1B3B6F"/>
                 </a:solidFill>
                 <a:latin typeface="Amiri" pitchFamily="2" charset="-78"/>
+                <a:ea typeface="Amiri" pitchFamily="2" charset="-78"/>
                 <a:cs typeface="Amiri" pitchFamily="2" charset="-78"/>
               </a:rPr>
               <a:t>نَصِيحَتِي لَكَ: يَجِبُ أَنْ …</a:t>
@@ -23674,6 +23815,7 @@
                   <a:srgbClr val="D4AF37"/>
                 </a:solidFill>
                 <a:latin typeface="Amiri" pitchFamily="2" charset="-78"/>
+                <a:ea typeface="Amiri" pitchFamily="2" charset="-78"/>
                 <a:cs typeface="Amiri" pitchFamily="2" charset="-78"/>
               </a:rPr>
               <a:t>م</a:t>
@@ -23994,6 +24136,7 @@
                   <a:srgbClr val="8A6D1E"/>
                 </a:solidFill>
                 <a:latin typeface="Amiri" pitchFamily="2" charset="-78"/>
+                <a:ea typeface="Amiri" pitchFamily="2" charset="-78"/>
                 <a:cs typeface="Amiri" pitchFamily="2" charset="-78"/>
               </a:rPr>
               <a:t>نَصُّ السُّؤَالِ</a:t>
@@ -24274,6 +24417,7 @@
                   <a:srgbClr val="1B3B6F"/>
                 </a:solidFill>
                 <a:latin typeface="Amiri" pitchFamily="2" charset="-78"/>
+                <a:ea typeface="Amiri" pitchFamily="2" charset="-78"/>
                 <a:cs typeface="Amiri" pitchFamily="2" charset="-78"/>
               </a:rPr>
               <a:t>سَأَلَكَ صَدِيقُكَ عَنْ أُسْلُوبِ حَيَاتِكَ. اكْتُبْ لَهُ رِسَالَةً إِلِكْتِرُونِيَّةً (٨٠–٩٠ كَلِمَةً).</a:t>
@@ -24415,6 +24559,7 @@
                   <a:srgbClr val="1B3B6F"/>
                 </a:solidFill>
                 <a:latin typeface="Amiri" pitchFamily="2" charset="-78"/>
+                <a:ea typeface="Amiri" pitchFamily="2" charset="-78"/>
                 <a:cs typeface="Amiri" pitchFamily="2" charset="-78"/>
               </a:rPr>
               <a:t>مَاذَا تَأْكُلُ وَتَشْرَبُ لِتُحَافِظَ عَلَى صِحَّتِكَ؟</a:t>
@@ -24556,6 +24701,7 @@
                   <a:srgbClr val="1B3B6F"/>
                 </a:solidFill>
                 <a:latin typeface="Amiri" pitchFamily="2" charset="-78"/>
+                <a:ea typeface="Amiri" pitchFamily="2" charset="-78"/>
                 <a:cs typeface="Amiri" pitchFamily="2" charset="-78"/>
               </a:rPr>
               <a:t>أَيَّ رِيَاضَةٍ تُمَارِسُ؟ وَكَمْ مَرَّةً؟</a:t>
@@ -24697,6 +24843,7 @@
                   <a:srgbClr val="1B3B6F"/>
                 </a:solidFill>
                 <a:latin typeface="Amiri" pitchFamily="2" charset="-78"/>
+                <a:ea typeface="Amiri" pitchFamily="2" charset="-78"/>
                 <a:cs typeface="Amiri" pitchFamily="2" charset="-78"/>
               </a:rPr>
               <a:t>مَا العَادَةُ غَيْرُ الصِّحِّيَّةِ الَّتِي عِنْدَكَ؟</a:t>
@@ -24838,6 +24985,7 @@
                   <a:srgbClr val="1B3B6F"/>
                 </a:solidFill>
                 <a:latin typeface="Amiri" pitchFamily="2" charset="-78"/>
+                <a:ea typeface="Amiri" pitchFamily="2" charset="-78"/>
                 <a:cs typeface="Amiri" pitchFamily="2" charset="-78"/>
               </a:rPr>
               <a:t>مَاذَا فَعَلْتَ أَمْسِ لِصِحَّتِكَ؟ وَمَا نَصِيحَتُكَ لِصَدِيقِكَ؟</a:t>
@@ -25047,6 +25195,7 @@
                   <a:srgbClr val="D4AF37"/>
                 </a:solidFill>
                 <a:latin typeface="Amiri" pitchFamily="2" charset="-78"/>
+                <a:ea typeface="Amiri" pitchFamily="2" charset="-78"/>
                 <a:cs typeface="Amiri" pitchFamily="2" charset="-78"/>
               </a:rPr>
               <a:t>م</a:t>
@@ -25367,6 +25516,7 @@
                   <a:srgbClr val="8A6D1E"/>
                 </a:solidFill>
                 <a:latin typeface="Amiri" pitchFamily="2" charset="-78"/>
+                <a:ea typeface="Amiri" pitchFamily="2" charset="-78"/>
                 <a:cs typeface="Amiri" pitchFamily="2" charset="-78"/>
               </a:rPr>
               <a:t>قَوَالِبُ الكِتَابَةِ</a:t>
@@ -25647,6 +25797,7 @@
                   <a:srgbClr val="1B3B6F"/>
                 </a:solidFill>
                 <a:latin typeface="Amiri" pitchFamily="2" charset="-78"/>
+                <a:ea typeface="Amiri" pitchFamily="2" charset="-78"/>
                 <a:cs typeface="Amiri" pitchFamily="2" charset="-78"/>
               </a:rPr>
               <a:t>مَرْحَبًا يَا ______ ، كَيْفَ حَالُكَ؟</a:t>
@@ -25853,6 +26004,7 @@
                   <a:srgbClr val="1B3B6F"/>
                 </a:solidFill>
                 <a:latin typeface="Amiri" pitchFamily="2" charset="-78"/>
+                <a:ea typeface="Amiri" pitchFamily="2" charset="-78"/>
                 <a:cs typeface="Amiri" pitchFamily="2" charset="-78"/>
               </a:rPr>
               <a:t>آكُلُ ______ كُلَّ يَوْمٍ، وَأَشْرَبُ ______ .</a:t>
@@ -26059,6 +26211,7 @@
                   <a:srgbClr val="1B3B6F"/>
                 </a:solidFill>
                 <a:latin typeface="Amiri" pitchFamily="2" charset="-78"/>
+                <a:ea typeface="Amiri" pitchFamily="2" charset="-78"/>
                 <a:cs typeface="Amiri" pitchFamily="2" charset="-78"/>
               </a:rPr>
               <a:t>أُمَارِسُ ______ مَرَّتَيْنِ فِي الأُسْبُوعِ.</a:t>
@@ -26265,6 +26418,7 @@
                   <a:srgbClr val="1B3B6F"/>
                 </a:solidFill>
                 <a:latin typeface="Amiri" pitchFamily="2" charset="-78"/>
+                <a:ea typeface="Amiri" pitchFamily="2" charset="-78"/>
                 <a:cs typeface="Amiri" pitchFamily="2" charset="-78"/>
               </a:rPr>
               <a:t>لٰكِنِّي ______ أَحْيَانًا.</a:t>
@@ -26471,6 +26625,7 @@
                   <a:srgbClr val="1B3B6F"/>
                 </a:solidFill>
                 <a:latin typeface="Amiri" pitchFamily="2" charset="-78"/>
+                <a:ea typeface="Amiri" pitchFamily="2" charset="-78"/>
                 <a:cs typeface="Amiri" pitchFamily="2" charset="-78"/>
               </a:rPr>
               <a:t>أَمْسِ ______ . يَجِبُ أَنْ ______ لِأَنَّ ______ .</a:t>
@@ -26677,6 +26832,7 @@
                   <a:srgbClr val="1B3B6F"/>
                 </a:solidFill>
                 <a:latin typeface="Amiri" pitchFamily="2" charset="-78"/>
+                <a:ea typeface="Amiri" pitchFamily="2" charset="-78"/>
                 <a:cs typeface="Amiri" pitchFamily="2" charset="-78"/>
               </a:rPr>
               <a:t>مَعَ السَّلَامَةِ، ______</a:t>
@@ -26916,13 +27072,9 @@
     <a:fontScheme name="Office">
       <a:majorFont>
         <a:latin typeface="Calibri Light" panose="020F0302020204030204"/>
-        <a:ea typeface=""/>
-        <a:cs typeface=""/>
-        <a:font script="Jpan" typeface="游ゴシック Light"/>
-        <a:font script="Hang" typeface="맑은 고딕"/>
-        <a:font script="Hans" typeface="等线 Light"/>
-        <a:font script="Hant" typeface="新細明體"/>
-        <a:font script="Arab" typeface="Times New Roman"/>
+        <a:ea typeface="Amiri" pitchFamily="2" charset="-78"/>
+        <a:cs typeface="Amiri" pitchFamily="2" charset="-78"/>
+        <a:font script="Arab" typeface="Amiri"/>
         <a:font script="Hebr" typeface="Times New Roman"/>
         <a:font script="Thai" typeface="Angsana New"/>
         <a:font script="Ethi" typeface="Nyala"/>
@@ -26968,13 +27120,9 @@
       </a:majorFont>
       <a:minorFont>
         <a:latin typeface="Calibri" panose="020F0502020204030204"/>
-        <a:ea typeface=""/>
-        <a:cs typeface=""/>
-        <a:font script="Jpan" typeface="游ゴシック"/>
-        <a:font script="Hang" typeface="맑은 고딕"/>
-        <a:font script="Hans" typeface="等线"/>
-        <a:font script="Hant" typeface="新細明體"/>
-        <a:font script="Arab" typeface="Arial"/>
+        <a:ea typeface="Amiri" pitchFamily="2" charset="-78"/>
+        <a:cs typeface="Amiri" pitchFamily="2" charset="-78"/>
+        <a:font script="Arab" typeface="Amiri"/>
         <a:font script="Hebr" typeface="Arial"/>
         <a:font script="Thai" typeface="Cordia New"/>
         <a:font script="Ethi" typeface="Nyala"/>

--- a/Topic_A/Exam_Practice/AT-A-L06_Writing_Workshop_Healthy_Eating_and_Lifestyle_Choices.pptx
+++ b/Topic_A/Exam_Practice/AT-A-L06_Writing_Workshop_Healthy_Eating_and_Lifestyle_Choices.pptx
@@ -3852,7 +3852,7 @@
                 <a:solidFill>
                   <a:srgbClr val="FFFFFF"/>
                 </a:solidFill>
-                <a:latin typeface="Calibri" pitchFamily="34" charset="0"/>
+                <a:latin typeface="Amiri" pitchFamily="2" charset="-78"/>
                 <a:ea typeface="Amiri" pitchFamily="2" charset="-78"/>
                 <a:cs typeface="Amiri" pitchFamily="2" charset="-78"/>
               </a:rPr>
@@ -3918,7 +3918,7 @@
                 <a:solidFill>
                   <a:srgbClr val="FFFFFF"/>
                 </a:solidFill>
-                <a:latin typeface="Calibri" pitchFamily="34" charset="0"/>
+                <a:latin typeface="Amiri" pitchFamily="2" charset="-78"/>
                 <a:ea typeface="Amiri" pitchFamily="2" charset="-78"/>
                 <a:cs typeface="Amiri" pitchFamily="2" charset="-78"/>
               </a:rPr>
@@ -3984,7 +3984,7 @@
                 <a:solidFill>
                   <a:srgbClr val="FFFFFF"/>
                 </a:solidFill>
-                <a:latin typeface="Calibri" pitchFamily="34" charset="0"/>
+                <a:latin typeface="Amiri" pitchFamily="2" charset="-78"/>
                 <a:ea typeface="Amiri" pitchFamily="2" charset="-78"/>
                 <a:cs typeface="Amiri" pitchFamily="2" charset="-78"/>
               </a:rPr>
@@ -4050,7 +4050,7 @@
                 <a:solidFill>
                   <a:srgbClr val="FFFFFF"/>
                 </a:solidFill>
-                <a:latin typeface="Calibri" pitchFamily="34" charset="0"/>
+                <a:latin typeface="Amiri" pitchFamily="2" charset="-78"/>
                 <a:ea typeface="Amiri" pitchFamily="2" charset="-78"/>
                 <a:cs typeface="Amiri" pitchFamily="2" charset="-78"/>
               </a:rPr>
@@ -4848,7 +4848,7 @@
                 <a:solidFill>
                   <a:srgbClr val="FFFFFF"/>
                 </a:solidFill>
-                <a:latin typeface="Calibri" pitchFamily="34" charset="0"/>
+                <a:latin typeface="Amiri" pitchFamily="2" charset="-78"/>
                 <a:ea typeface="Amiri" pitchFamily="2" charset="-78"/>
                 <a:cs typeface="Amiri" pitchFamily="2" charset="-78"/>
               </a:rPr>
@@ -4914,7 +4914,7 @@
                 <a:solidFill>
                   <a:srgbClr val="FFFFFF"/>
                 </a:solidFill>
-                <a:latin typeface="Calibri" pitchFamily="34" charset="0"/>
+                <a:latin typeface="Amiri" pitchFamily="2" charset="-78"/>
                 <a:ea typeface="Amiri" pitchFamily="2" charset="-78"/>
                 <a:cs typeface="Amiri" pitchFamily="2" charset="-78"/>
               </a:rPr>
@@ -4980,7 +4980,7 @@
                 <a:solidFill>
                   <a:srgbClr val="FFFFFF"/>
                 </a:solidFill>
-                <a:latin typeface="Calibri" pitchFamily="34" charset="0"/>
+                <a:latin typeface="Amiri" pitchFamily="2" charset="-78"/>
                 <a:ea typeface="Amiri" pitchFamily="2" charset="-78"/>
                 <a:cs typeface="Amiri" pitchFamily="2" charset="-78"/>
               </a:rPr>
@@ -5046,7 +5046,7 @@
                 <a:solidFill>
                   <a:srgbClr val="FFFFFF"/>
                 </a:solidFill>
-                <a:latin typeface="Calibri" pitchFamily="34" charset="0"/>
+                <a:latin typeface="Amiri" pitchFamily="2" charset="-78"/>
                 <a:ea typeface="Amiri" pitchFamily="2" charset="-78"/>
                 <a:cs typeface="Amiri" pitchFamily="2" charset="-78"/>
               </a:rPr>
@@ -8606,7 +8606,7 @@
                 <a:solidFill>
                   <a:srgbClr val="FFFFFF"/>
                 </a:solidFill>
-                <a:latin typeface="Calibri" pitchFamily="34" charset="0"/>
+                <a:latin typeface="Amiri" pitchFamily="2" charset="-78"/>
                 <a:ea typeface="Amiri" pitchFamily="2" charset="-78"/>
                 <a:cs typeface="Amiri" pitchFamily="2" charset="-78"/>
               </a:rPr>
@@ -8672,7 +8672,7 @@
                 <a:solidFill>
                   <a:srgbClr val="FFFFFF"/>
                 </a:solidFill>
-                <a:latin typeface="Calibri" pitchFamily="34" charset="0"/>
+                <a:latin typeface="Amiri" pitchFamily="2" charset="-78"/>
                 <a:ea typeface="Amiri" pitchFamily="2" charset="-78"/>
                 <a:cs typeface="Amiri" pitchFamily="2" charset="-78"/>
               </a:rPr>
@@ -8738,7 +8738,7 @@
                 <a:solidFill>
                   <a:srgbClr val="FFFFFF"/>
                 </a:solidFill>
-                <a:latin typeface="Calibri" pitchFamily="34" charset="0"/>
+                <a:latin typeface="Amiri" pitchFamily="2" charset="-78"/>
                 <a:ea typeface="Amiri" pitchFamily="2" charset="-78"/>
                 <a:cs typeface="Amiri" pitchFamily="2" charset="-78"/>
               </a:rPr>
@@ -8804,7 +8804,7 @@
                 <a:solidFill>
                   <a:srgbClr val="FFFFFF"/>
                 </a:solidFill>
-                <a:latin typeface="Calibri" pitchFamily="34" charset="0"/>
+                <a:latin typeface="Amiri" pitchFamily="2" charset="-78"/>
                 <a:ea typeface="Amiri" pitchFamily="2" charset="-78"/>
                 <a:cs typeface="Amiri" pitchFamily="2" charset="-78"/>
               </a:rPr>
@@ -9591,7 +9591,7 @@
                 <a:solidFill>
                   <a:srgbClr val="FFFFFF"/>
                 </a:solidFill>
-                <a:latin typeface="Calibri" pitchFamily="34" charset="0"/>
+                <a:latin typeface="Amiri" pitchFamily="2" charset="-78"/>
                 <a:ea typeface="Amiri" pitchFamily="2" charset="-78"/>
                 <a:cs typeface="Amiri" pitchFamily="2" charset="-78"/>
               </a:rPr>
@@ -9657,7 +9657,7 @@
                 <a:solidFill>
                   <a:srgbClr val="FFFFFF"/>
                 </a:solidFill>
-                <a:latin typeface="Calibri" pitchFamily="34" charset="0"/>
+                <a:latin typeface="Amiri" pitchFamily="2" charset="-78"/>
                 <a:ea typeface="Amiri" pitchFamily="2" charset="-78"/>
                 <a:cs typeface="Amiri" pitchFamily="2" charset="-78"/>
               </a:rPr>
@@ -9723,7 +9723,7 @@
                 <a:solidFill>
                   <a:srgbClr val="FFFFFF"/>
                 </a:solidFill>
-                <a:latin typeface="Calibri" pitchFamily="34" charset="0"/>
+                <a:latin typeface="Amiri" pitchFamily="2" charset="-78"/>
                 <a:ea typeface="Amiri" pitchFamily="2" charset="-78"/>
                 <a:cs typeface="Amiri" pitchFamily="2" charset="-78"/>
               </a:rPr>
@@ -9789,7 +9789,7 @@
                 <a:solidFill>
                   <a:srgbClr val="FFFFFF"/>
                 </a:solidFill>
-                <a:latin typeface="Calibri" pitchFamily="34" charset="0"/>
+                <a:latin typeface="Amiri" pitchFamily="2" charset="-78"/>
                 <a:ea typeface="Amiri" pitchFamily="2" charset="-78"/>
                 <a:cs typeface="Amiri" pitchFamily="2" charset="-78"/>
               </a:rPr>
@@ -10576,7 +10576,7 @@
                 <a:solidFill>
                   <a:srgbClr val="FFFFFF"/>
                 </a:solidFill>
-                <a:latin typeface="Calibri" pitchFamily="34" charset="0"/>
+                <a:latin typeface="Amiri" pitchFamily="2" charset="-78"/>
                 <a:ea typeface="Amiri" pitchFamily="2" charset="-78"/>
                 <a:cs typeface="Amiri" pitchFamily="2" charset="-78"/>
               </a:rPr>
@@ -10642,7 +10642,7 @@
                 <a:solidFill>
                   <a:srgbClr val="FFFFFF"/>
                 </a:solidFill>
-                <a:latin typeface="Calibri" pitchFamily="34" charset="0"/>
+                <a:latin typeface="Amiri" pitchFamily="2" charset="-78"/>
                 <a:ea typeface="Amiri" pitchFamily="2" charset="-78"/>
                 <a:cs typeface="Amiri" pitchFamily="2" charset="-78"/>
               </a:rPr>
@@ -10708,7 +10708,7 @@
                 <a:solidFill>
                   <a:srgbClr val="FFFFFF"/>
                 </a:solidFill>
-                <a:latin typeface="Calibri" pitchFamily="34" charset="0"/>
+                <a:latin typeface="Amiri" pitchFamily="2" charset="-78"/>
                 <a:ea typeface="Amiri" pitchFamily="2" charset="-78"/>
                 <a:cs typeface="Amiri" pitchFamily="2" charset="-78"/>
               </a:rPr>
@@ -10774,7 +10774,7 @@
                 <a:solidFill>
                   <a:srgbClr val="FFFFFF"/>
                 </a:solidFill>
-                <a:latin typeface="Calibri" pitchFamily="34" charset="0"/>
+                <a:latin typeface="Amiri" pitchFamily="2" charset="-78"/>
                 <a:ea typeface="Amiri" pitchFamily="2" charset="-78"/>
                 <a:cs typeface="Amiri" pitchFamily="2" charset="-78"/>
               </a:rPr>
